--- a/docs/営業改革グランドデザイン_円谷.pptx
+++ b/docs/営業改革グランドデザイン_円谷.pptx
@@ -3292,7 +3292,7 @@
                 <a:ea typeface="Yu Gothic"/>
                 <a:cs typeface="Yu Gothic"/>
               </a:rPr>
-              <a:t>円谷プロダクション / 円谷フィールズホールディングス 経営陣 御中</a:t>
+              <a:t>経営陣ならびに営業・関連部門の皆さんへ</a:t>
             </a:r>
           </a:p>
         </p:txBody>
@@ -3410,7 +3410,7 @@
                 <a:ea typeface="Yu Gothic"/>
                 <a:cs typeface="Yu Gothic"/>
               </a:rPr>
-              <a:t>A.T. Kearney　シニアパートナー / 営業改革責任者</a:t>
+              <a:t>円谷プロダクション　専務執行役員　新谷 隼人（本改革スポンサー）</a:t>
             </a:r>
           </a:p>
           <a:p>
@@ -3428,7 +3428,7 @@
                 <a:ea typeface="Yu Gothic"/>
                 <a:cs typeface="Yu Gothic"/>
               </a:rPr>
-              <a:t>経営陣意思決定用資料（ドラフト・社外秘）</a:t>
+              <a:t>経営会議付議・全社共有資料（ドラフト・社外秘）</a:t>
             </a:r>
           </a:p>
           <a:p>
@@ -3446,7 +3446,7 @@
                 <a:ea typeface="Yu Gothic"/>
                 <a:cs typeface="Yu Gothic"/>
               </a:rPr>
-              <a:t>本資料の社内実態に関する記述は初期インタビューに基づく「課題仮説」であり、Day 1〜30の初期診断で検証する。市場・業績に関する記述は公表IR資料・公式情報を前提とし、出所が確認できない数値は「仮説」「要確認」と明記する。</a:t>
+              <a:t>本資料は、私が営業改革のスポンサーとして経営会議に付議し、関係者全員と共有するものである。社内実態に関する記述は初期ヒアリングに基づく「課題仮説」であり、Day 1〜30の初期診断で検証する。市場・業績に関する記述は公表IR資料・公式情報を前提とし、出所が確認できない数値は「仮説」「要確認」と明記する。</a:t>
             </a:r>
           </a:p>
         </p:txBody>
@@ -3909,7 +3909,7 @@
                 <a:ea typeface="Yu Gothic"/>
                 <a:cs typeface="Yu Gothic"/>
               </a:rPr>
-              <a:t>経営陣への問い・意思決定事項　</a:t>
+              <a:t>経営会議での意思決定・お願い事項　</a:t>
             </a:r>
             <a:r>
               <a:rPr sz="1000" b="0" i="0">
@@ -3920,7 +3920,7 @@
                 <a:ea typeface="Yu Gothic"/>
                 <a:cs typeface="Yu Gothic"/>
               </a:rPr>
-              <a:t>経営陣の面談後、48時間以内にSTOへ機会を登録する運用に、経営陣自身がコミットいただけるか</a:t>
+              <a:t>面談後48時間以内にSTOへ機会を登録する運用に、私を含む経営陣自身がコミットすることを提案する</a:t>
             </a:r>
           </a:p>
         </p:txBody>
@@ -4527,7 +4527,7 @@
                 <a:ea typeface="Yu Gothic"/>
                 <a:cs typeface="Yu Gothic"/>
               </a:rPr>
-              <a:t>経営陣への問い・意思決定事項　</a:t>
+              <a:t>経営会議での意思決定・お願い事項　</a:t>
             </a:r>
             <a:r>
               <a:rPr sz="1000" b="0" i="0">
@@ -4538,7 +4538,7 @@
                 <a:ea typeface="Yu Gothic"/>
                 <a:cs typeface="Yu Gothic"/>
               </a:rPr>
-              <a:t>月次の営業ポートフォリオ会議に経営陣が出席し、撤退・経営支援の判断を行う運営に合意いただけるか</a:t>
+              <a:t>月次の営業ポートフォリオ会議に経営陣が出席し、撤退・経営支援の判断を行う運営への合意を求める</a:t>
             </a:r>
           </a:p>
         </p:txBody>
@@ -5163,7 +5163,7 @@
                 <a:ea typeface="Yu Gothic"/>
                 <a:cs typeface="Yu Gothic"/>
               </a:rPr>
-              <a:t>経営陣への問い・意思決定事項　</a:t>
+              <a:t>経営会議での意思決定・お願い事項　</a:t>
             </a:r>
             <a:r>
               <a:rPr sz="1000" b="0" i="0">
@@ -5174,7 +5174,7 @@
                 <a:ea typeface="Yu Gothic"/>
                 <a:cs typeface="Yu Gothic"/>
               </a:rPr>
-              <a:t>7つの基本思想を、経営陣名義の全社メッセージとして発信いただけるか</a:t>
+              <a:t>7つの基本思想を、経営陣連名の全社メッセージとして発信することを提案する</a:t>
             </a:r>
           </a:p>
         </p:txBody>
@@ -6216,7 +6216,7 @@
                 <a:ea typeface="Yu Gothic"/>
                 <a:cs typeface="Yu Gothic"/>
               </a:rPr>
-              <a:t>経営陣への問い・意思決定事項　</a:t>
+              <a:t>経営会議での意思決定・お願い事項　</a:t>
             </a:r>
             <a:r>
               <a:rPr sz="1000" b="0" i="0">
@@ -6227,7 +6227,7 @@
                 <a:ea typeface="Yu Gothic"/>
                 <a:cs typeface="Yu Gothic"/>
               </a:rPr>
-              <a:t>5つの棚卸しの30日以内実施と、請求・契約データへのSTOアクセス権付与を承認いただけるか</a:t>
+              <a:t>5つの棚卸しの30日以内実施と、請求・契約データへのSTOアクセス権付与の承認を求める</a:t>
             </a:r>
           </a:p>
         </p:txBody>
@@ -6834,7 +6834,7 @@
                 <a:ea typeface="Yu Gothic"/>
                 <a:cs typeface="Yu Gothic"/>
               </a:rPr>
-              <a:t>経営陣への問い・意思決定事項　</a:t>
+              <a:t>経営会議での意思決定・お願い事項　</a:t>
             </a:r>
             <a:r>
               <a:rPr sz="1000" b="0" i="0">
@@ -6845,7 +6845,7 @@
                 <a:ea typeface="Yu Gothic"/>
                 <a:cs typeface="Yu Gothic"/>
               </a:rPr>
-              <a:t>工数把握の目的（評価に使わない・時間を取り戻すため）を経営陣名義で宣言した上で、90日間の時限計測開始を承認いただけるか</a:t>
+              <a:t>工数把握の目的（評価に使わない・時間を取り戻すため）を経営陣名義で宣言した上で、90日間の時限計測を開始したい——承認を求める</a:t>
             </a:r>
           </a:p>
         </p:txBody>
@@ -8196,7 +8196,7 @@
                 <a:ea typeface="Yu Gothic"/>
                 <a:cs typeface="Yu Gothic"/>
               </a:rPr>
-              <a:t>経営陣への問い・意思決定事項　</a:t>
+              <a:t>経営会議での意思決定・お願い事項　</a:t>
             </a:r>
             <a:r>
               <a:rPr sz="1000" b="0" i="0">
@@ -8207,7 +8207,7 @@
                 <a:ea typeface="Yu Gothic"/>
                 <a:cs typeface="Yu Gothic"/>
               </a:rPr>
-              <a:t>7軸モデルの導入と、ウェイト確定のための経営ワークショップへの参加を承認いただけるか</a:t>
+              <a:t>7軸モデルの導入と、ウェイト確定のための経営ワークショップ（半日）の開催承認を求める</a:t>
             </a:r>
           </a:p>
         </p:txBody>
@@ -8832,7 +8832,7 @@
                 <a:ea typeface="Yu Gothic"/>
                 <a:cs typeface="Yu Gothic"/>
               </a:rPr>
-              <a:t>経営陣への問い・意思決定事項　</a:t>
+              <a:t>経営会議での意思決定・お願い事項　</a:t>
             </a:r>
             <a:r>
               <a:rPr sz="1000" b="0" i="0">
@@ -8843,7 +8843,7 @@
                 <a:ea typeface="Yu Gothic"/>
                 <a:cs typeface="Yu Gothic"/>
               </a:rPr>
-              <a:t>Sランク顧客への経営スポンサー制（経営陣が担当顧客を持つ）を導入いただけるか</a:t>
+              <a:t>Sランク顧客への経営スポンサー制（経営陣が担当顧客を持つ）を導入したい。私自身も担当顧客を持つ</a:t>
             </a:r>
           </a:p>
         </p:txBody>
@@ -9450,7 +9450,7 @@
                 <a:ea typeface="Yu Gothic"/>
                 <a:cs typeface="Yu Gothic"/>
               </a:rPr>
-              <a:t>経営陣への問い・意思決定事項　</a:t>
+              <a:t>経営会議での意思決定・お願い事項　</a:t>
             </a:r>
             <a:r>
               <a:rPr sz="1000" b="0" i="0">
@@ -9461,7 +9461,7 @@
                 <a:ea typeface="Yu Gothic"/>
                 <a:cs typeface="Yu Gothic"/>
               </a:rPr>
-              <a:t>撤退・省力化の判断ルール（初期案）と、判断の最終責任を月次ポートフォリオ会議（経営出席）が持つことを承認いただけるか</a:t>
+              <a:t>撤退・省力化の判断ルール（初期案）と、判断の最終責任を月次ポートフォリオ会議（経営出席）が持つことの承認を求める</a:t>
             </a:r>
           </a:p>
         </p:txBody>
@@ -10086,7 +10086,7 @@
                 <a:ea typeface="Yu Gothic"/>
                 <a:cs typeface="Yu Gothic"/>
               </a:rPr>
-              <a:t>経営陣への問い・意思決定事項　</a:t>
+              <a:t>経営会議での意思決定・お願い事項　</a:t>
             </a:r>
             <a:r>
               <a:rPr sz="1000" b="0" i="0">
@@ -10097,7 +10097,7 @@
                 <a:ea typeface="Yu Gothic"/>
                 <a:cs typeface="Yu Gothic"/>
               </a:rPr>
-              <a:t>監修・契約プロセス改革のワーキンググループ（営業＋監修＋法務＋STO）設置を承認いただけるか</a:t>
+              <a:t>監修・契約プロセス改革のワーキンググループ（営業＋監修＋法務＋STO）設置の承認を求める</a:t>
             </a:r>
           </a:p>
         </p:txBody>
@@ -11267,7 +11267,7 @@
                 <a:ea typeface="Yu Gothic"/>
                 <a:cs typeface="Yu Gothic"/>
               </a:rPr>
-              <a:t>経営陣への問い・意思決定事項　</a:t>
+              <a:t>経営会議での意思決定・お願い事項　</a:t>
             </a:r>
             <a:r>
               <a:rPr sz="1000" b="0" i="0">
@@ -11278,7 +11278,7 @@
                 <a:ea typeface="Yu Gothic"/>
                 <a:cs typeface="Yu Gothic"/>
               </a:rPr>
-              <a:t>月次ポートフォリオ会議への経営陣の定例出席（90分/月）をコミットいただけるか</a:t>
+              <a:t>月次ポートフォリオ会議への定例出席（90分/月）を、私を含む経営陣でコミットしたい</a:t>
             </a:r>
           </a:p>
         </p:txBody>
@@ -12070,7 +12070,7 @@
                 <a:ea typeface="Yu Gothic"/>
                 <a:cs typeface="Yu Gothic"/>
               </a:rPr>
-              <a:t>経営陣への問い・意思決定事項　</a:t>
+              <a:t>経営会議での意思決定・お願い事項　</a:t>
             </a:r>
             <a:r>
               <a:rPr sz="1000" b="0" i="0">
@@ -12081,7 +12081,7 @@
                 <a:ea typeface="Yu Gothic"/>
                 <a:cs typeface="Yu Gothic"/>
               </a:rPr>
-              <a:t>本日、9つの意思決定（STO設置／棚卸し／工数把握／スコアリング／撤退ルール／経営支援／プロセス改革／AI PoC／ダッシュボードMVP）の承認を求める</a:t>
+              <a:t>本資料をもって経営会議に9つの意思決定（STO設置／棚卸し／工数把握／スコアリング／撤退ルール／経営支援／プロセス改革／AI PoC／ダッシュボードMVP）を付議する。実行の責任は私（新谷）が持つ</a:t>
             </a:r>
           </a:p>
         </p:txBody>
@@ -12706,7 +12706,7 @@
                 <a:ea typeface="Yu Gothic"/>
                 <a:cs typeface="Yu Gothic"/>
               </a:rPr>
-              <a:t>経営陣への問い・意思決定事項　</a:t>
+              <a:t>経営会議での意思決定・お願い事項　</a:t>
             </a:r>
             <a:r>
               <a:rPr sz="1000" b="0" i="0">
@@ -12717,7 +12717,7 @@
                 <a:ea typeface="Yu Gothic"/>
                 <a:cs typeface="Yu Gothic"/>
               </a:rPr>
-              <a:t>トップ外交の48時間登録ルールと、STOからの外交逆提案を受ける運用を承認いただけるか</a:t>
+              <a:t>トップ外交の48時間登録ルールと、STOからの外交逆提案を受ける運用の承認を求める</a:t>
             </a:r>
           </a:p>
         </p:txBody>
@@ -13324,7 +13324,7 @@
                 <a:ea typeface="Yu Gothic"/>
                 <a:cs typeface="Yu Gothic"/>
               </a:rPr>
-              <a:t>経営陣への問い・意思決定事項　</a:t>
+              <a:t>経営会議での意思決定・お願い事項　</a:t>
             </a:r>
             <a:r>
               <a:rPr sz="1000" b="0" i="0">
@@ -13335,7 +13335,7 @@
                 <a:ea typeface="Yu Gothic"/>
                 <a:cs typeface="Yu Gothic"/>
               </a:rPr>
-              <a:t>ダッシュボードMVP構築とAI営業支援PoC（2ユースケースから開始）の予算・体制を承認いただけるか</a:t>
+              <a:t>ダッシュボードMVP構築とAI営業支援PoC（2ユースケースから開始）の予算・体制の承認を求める</a:t>
             </a:r>
           </a:p>
         </p:txBody>
@@ -13741,7 +13741,7 @@
                 <a:ea typeface="Yu Gothic"/>
                 <a:cs typeface="Yu Gothic"/>
               </a:rPr>
-              <a:t>■ 経営スポンサー：経営陣から1名（月次会議議長を兼務）／STOリード：専任1名（現場からの信頼×データリテラシー×部門横断調整力——社内エースの投入を進言）</a:t>
+              <a:t>■ 経営スポンサー：私（新谷）が務める（月次会議議長を兼務）／STOリード：専任1名（現場からの信頼×データリテラシー×部門横断調整力——社内エースの投入をお願いしたい）</a:t>
             </a:r>
           </a:p>
           <a:p>
@@ -13777,7 +13777,7 @@
                 <a:ea typeface="Yu Gothic"/>
                 <a:cs typeface="Yu Gothic"/>
               </a:rPr>
-              <a:t>■ 外部支援は方法論・分析支援に限定し、12か月で内製化（外部依存の恒久化はしない）</a:t>
+              <a:t>■ 外部専門家の活用は方法論・分析支援に限定し、12か月で完全内製化する（外部依存の恒久化はしない）</a:t>
             </a:r>
           </a:p>
           <a:p>
@@ -13942,7 +13942,7 @@
                 <a:ea typeface="Yu Gothic"/>
                 <a:cs typeface="Yu Gothic"/>
               </a:rPr>
-              <a:t>経営陣への問い・意思決定事項　</a:t>
+              <a:t>経営会議での意思決定・お願い事項　</a:t>
             </a:r>
             <a:r>
               <a:rPr sz="1000" b="0" i="0">
@@ -13953,7 +13953,7 @@
                 <a:ea typeface="Yu Gothic"/>
                 <a:cs typeface="Yu Gothic"/>
               </a:rPr>
-              <a:t>STO設置、経営スポンサー任命、専任リード＋コア2〜3名のアサインを承認いただけるか</a:t>
+              <a:t>STO設置と専任リード＋コア2〜3名のアサインの承認を求める。経営スポンサーは私（新谷）が務める</a:t>
             </a:r>
           </a:p>
         </p:txBody>
@@ -14871,7 +14871,7 @@
                 <a:ea typeface="Yu Gothic"/>
                 <a:cs typeface="Yu Gothic"/>
               </a:rPr>
-              <a:t>経営陣への問い・意思決定事項　</a:t>
+              <a:t>経営会議での意思決定・お願い事項　</a:t>
             </a:r>
             <a:r>
               <a:rPr sz="1000" b="0" i="0">
@@ -14882,7 +14882,7 @@
                 <a:ea typeface="Yu Gothic"/>
                 <a:cs typeface="Yu Gothic"/>
               </a:rPr>
-              <a:t>Day 30・60・90の経営報告会（各60〜90分）の日程を本日確定いただけるか</a:t>
+              <a:t>Day 30・60・90の経営報告会（各60〜90分）の日程を本日確定したい</a:t>
             </a:r>
           </a:p>
         </p:txBody>
@@ -15981,7 +15981,7 @@
                 <a:ea typeface="Yu Gothic"/>
                 <a:cs typeface="Yu Gothic"/>
               </a:rPr>
-              <a:t>経営陣への問い・意思決定事項　</a:t>
+              <a:t>経営会議での意思決定・お願い事項　</a:t>
             </a:r>
             <a:r>
               <a:rPr sz="1000" b="0" i="0">
@@ -15992,7 +15992,7 @@
                 <a:ea typeface="Yu Gothic"/>
                 <a:cs typeface="Yu Gothic"/>
               </a:rPr>
-              <a:t>12か月ロードマップの大枠と、Month 6のシステム投資判断ゲートの設定に合意いただけるか</a:t>
+              <a:t>12か月ロードマップの大枠と、Month 6のシステム投資判断ゲートの設定への合意を求める</a:t>
             </a:r>
           </a:p>
         </p:txBody>
@@ -16617,7 +16617,7 @@
                 <a:ea typeface="Yu Gothic"/>
                 <a:cs typeface="Yu Gothic"/>
               </a:rPr>
-              <a:t>経営陣への問い・意思決定事項　</a:t>
+              <a:t>経営会議での意思決定・お願い事項　</a:t>
             </a:r>
             <a:r>
               <a:rPr sz="1000" b="0" i="0">
@@ -16628,7 +16628,7 @@
                 <a:ea typeface="Yu Gothic"/>
                 <a:cs typeface="Yu Gothic"/>
               </a:rPr>
-              <a:t>「粗利/営業工数」を営業改革の中核指標とすることに合意いただけるか</a:t>
+              <a:t>「粗利/営業工数」を営業改革の中核指標とすることへの合意を求める</a:t>
             </a:r>
           </a:p>
         </p:txBody>
@@ -16854,7 +16854,7 @@
                 <a:ea typeface="Yu Gothic"/>
                 <a:cs typeface="Yu Gothic"/>
               </a:rPr>
-              <a:t>本日、経営陣に9つの意思決定を求める</a:t>
+              <a:t>本日、経営会議に9つの意思決定を付議する</a:t>
             </a:r>
           </a:p>
         </p:txBody>
@@ -18567,7 +18567,7 @@
                 <a:ea typeface="Yu Gothic"/>
                 <a:cs typeface="Yu Gothic"/>
               </a:rPr>
-              <a:t>経営陣への問い・意思決定事項　</a:t>
+              <a:t>経営会議での意思決定・お願い事項　</a:t>
             </a:r>
             <a:r>
               <a:rPr sz="1000" b="0" i="0">
@@ -18578,7 +18578,7 @@
                 <a:ea typeface="Yu Gothic"/>
                 <a:cs typeface="Yu Gothic"/>
               </a:rPr>
-              <a:t>9項目それぞれについて、本日の承認・条件付き承認・追加検討の判定をいただきたい</a:t>
+              <a:t>9項目それぞれについて、本日の経営会議で承認・条件付き承認・追加検討の判定をいただきたい</a:t>
             </a:r>
           </a:p>
         </p:txBody>
@@ -18804,7 +18804,7 @@
                 <a:ea typeface="Yu Gothic"/>
                 <a:cs typeface="Yu Gothic"/>
               </a:rPr>
-              <a:t>承認にあたって、経営陣に確認いただきたい「3つの覚悟」</a:t>
+              <a:t>承認にあたって、我々経営陣で共有したい「3つの覚悟」</a:t>
             </a:r>
           </a:p>
         </p:txBody>
@@ -18889,7 +18889,7 @@
                 <a:ea typeface="Yu Gothic"/>
                 <a:cs typeface="Yu Gothic"/>
               </a:rPr>
-              <a:t>求めているのは大規模投資ではなく、経営の時間と判断のコミットメントである</a:t>
+              <a:t>必要なのは大規模投資ではなく、我々経営陣の時間と判断のコミットメントである</a:t>
             </a:r>
           </a:p>
         </p:txBody>
@@ -19056,7 +19056,7 @@
                 <a:ea typeface="Yu Gothic"/>
                 <a:cs typeface="Yu Gothic"/>
               </a:rPr>
-              <a:t>本日9項目の承認をいただければ、Day 1として直ちにキックオフし、30日後に「円谷の営業の全量」を初めて経営陣にお見せする。</a:t>
+              <a:t>本日9項目が承認されれば、Day 1として直ちにキックオフし、30日後に「円谷の営業の全量」を初めて経営会議にお見せする。実行の責任は私が持つ。</a:t>
             </a:r>
           </a:p>
         </p:txBody>
@@ -20745,7 +20745,7 @@
                 <a:ea typeface="Yu Gothic"/>
                 <a:cs typeface="Yu Gothic"/>
               </a:rPr>
-              <a:t>経営陣への問い・意思決定事項　</a:t>
+              <a:t>経営会議での意思決定・お願い事項　</a:t>
             </a:r>
             <a:r>
               <a:rPr sz="1000" b="0" i="0">
@@ -20756,7 +20756,7 @@
                 <a:ea typeface="Yu Gothic"/>
                 <a:cs typeface="Yu Gothic"/>
               </a:rPr>
-              <a:t>Day 30 初期診断報告会での仮説検証レビューに合意いただけるか</a:t>
+              <a:t>Day 30 初期診断報告会で仮説検証結果を私から報告する——経営会議でのレビューをお願いしたい</a:t>
             </a:r>
           </a:p>
         </p:txBody>
@@ -30333,7 +30333,7 @@
                 <a:ea typeface="Yu Gothic"/>
                 <a:cs typeface="Yu Gothic"/>
               </a:rPr>
-              <a:t>※ 改革成否の半分は、経営陣がこの改革を「営業部門の宿題」にしないことで決まる</a:t>
+              <a:t>※ 改革成否の半分は、私を含む経営陣がこの改革を「営業部門の宿題」にしないことで決まる</a:t>
             </a:r>
           </a:p>
         </p:txBody>
@@ -30462,7 +30462,7 @@
                 <a:ea typeface="Yu Gothic"/>
                 <a:cs typeface="Yu Gothic"/>
               </a:rPr>
-              <a:t>経営陣への問い・意思決定事項　</a:t>
+              <a:t>経営会議での意思決定・お願い事項　</a:t>
             </a:r>
             <a:r>
               <a:rPr sz="1000" b="0" i="0">
@@ -30473,7 +30473,7 @@
                 <a:ea typeface="Yu Gothic"/>
                 <a:cs typeface="Yu Gothic"/>
               </a:rPr>
-              <a:t>この改革を「全社改革」として位置づけ、経営スポンサーを置くことに合意いただけるか</a:t>
+              <a:t>この改革を「全社改革」として位置づけることに合意いただきたい。経営スポンサーは私（新谷）が務める</a:t>
             </a:r>
           </a:p>
         </p:txBody>
@@ -31098,7 +31098,7 @@
                 <a:ea typeface="Yu Gothic"/>
                 <a:cs typeface="Yu Gothic"/>
               </a:rPr>
-              <a:t>経営陣への問い・意思決定事項　</a:t>
+              <a:t>経営会議での意思決定・お願い事項　</a:t>
             </a:r>
             <a:r>
               <a:rPr sz="1000" b="0" i="0">
@@ -31109,7 +31109,7 @@
                 <a:ea typeface="Yu Gothic"/>
                 <a:cs typeface="Yu Gothic"/>
               </a:rPr>
-              <a:t>12営業領域の全体像として過不足はないか（改革対象範囲の確定）</a:t>
+              <a:t>12営業領域の全体像として過不足はないか——本日の経営会議で改革対象範囲を確定したい</a:t>
             </a:r>
           </a:p>
         </p:txBody>
@@ -31716,7 +31716,7 @@
                 <a:ea typeface="Yu Gothic"/>
                 <a:cs typeface="Yu Gothic"/>
               </a:rPr>
-              <a:t>経営陣への問い・意思決定事項　</a:t>
+              <a:t>経営会議での意思決定・お願い事項　</a:t>
             </a:r>
             <a:r>
               <a:rPr sz="1000" b="0" i="0">
@@ -31727,7 +31727,7 @@
                 <a:ea typeface="Yu Gothic"/>
                 <a:cs typeface="Yu Gothic"/>
               </a:rPr>
-              <a:t>この課題仮説群を「初期診断で検証すべき論点」として承認いただけるか</a:t>
+              <a:t>この課題仮説群を「初期診断で検証すべき論点」として扱うことの承認を求める</a:t>
             </a:r>
           </a:p>
         </p:txBody>
@@ -32334,7 +32334,7 @@
                 <a:ea typeface="Yu Gothic"/>
                 <a:cs typeface="Yu Gothic"/>
               </a:rPr>
-              <a:t>経営陣への問い・意思決定事項　</a:t>
+              <a:t>経営会議での意思決定・お願い事項　</a:t>
             </a:r>
             <a:r>
               <a:rPr sz="1000" b="0" i="0">
@@ -32345,7 +32345,7 @@
                 <a:ea typeface="Yu Gothic"/>
                 <a:cs typeface="Yu Gothic"/>
               </a:rPr>
-              <a:t>経営として「6つの全量」を毎月見たいか（＝棚卸しとダッシュボードの要件定義そのもの）</a:t>
+              <a:t>「6つの全量」を経営として毎月見る——これを棚卸しとダッシュボードの要件として確定したい</a:t>
             </a:r>
           </a:p>
         </p:txBody>
@@ -32952,7 +32952,7 @@
                 <a:ea typeface="Yu Gothic"/>
                 <a:cs typeface="Yu Gothic"/>
               </a:rPr>
-              <a:t>経営陣への問い・意思決定事項　</a:t>
+              <a:t>経営会議での意思決定・お願い事項　</a:t>
             </a:r>
             <a:r>
               <a:rPr sz="1000" b="0" i="0">
@@ -32963,7 +32963,7 @@
                 <a:ea typeface="Yu Gothic"/>
                 <a:cs typeface="Yu Gothic"/>
               </a:rPr>
-              <a:t>7つの評価軸（売上・粗利・工数・戦略・CRM・IP/ブランド・海外）に、経営として加除したい軸はあるか</a:t>
+              <a:t>7つの評価軸（売上・粗利・工数・戦略・CRM・IP/ブランド・海外）に加除したい軸はあるか——経営会議で議論いただきたい</a:t>
             </a:r>
           </a:p>
         </p:txBody>
@@ -33570,7 +33570,7 @@
                 <a:ea typeface="Yu Gothic"/>
                 <a:cs typeface="Yu Gothic"/>
               </a:rPr>
-              <a:t>経営陣への問い・意思決定事項　</a:t>
+              <a:t>経営会議での意思決定・お願い事項　</a:t>
             </a:r>
             <a:r>
               <a:rPr sz="1000" b="0" i="0">
@@ -33581,7 +33581,7 @@
                 <a:ea typeface="Yu Gothic"/>
                 <a:cs typeface="Yu Gothic"/>
               </a:rPr>
-              <a:t>監修・契約プロセスの実態計測（リードタイム・差し戻し回数）を、関係部門を含めて実施することを承認いただけるか</a:t>
+              <a:t>監修・契約プロセスの実態計測（リードタイム・差し戻し回数）の実施への承認を求める。監修・法務・関係部門の皆さんには協力をお願いしたい</a:t>
             </a:r>
           </a:p>
         </p:txBody>
